--- a/stage_breakdown_table.pptx
+++ b/stage_breakdown_table.pptx
@@ -3166,7 +3166,7 @@
                           </a:solidFill>
                           <a:latin typeface="Helvetica Neue"/>
                         </a:rPr>
-                        <a:t>LoCoMo multi-hop + HaluMem multi-hop   ·   n = 57</a:t>
+                        <a:t>LoCoMo multi-hop + HaluMem multi-hop   ·   micro-average, n = 57</a:t>
                       </a:r>
                     </a:p>
                   </a:txBody>
@@ -3230,7 +3230,7 @@
                           </a:solidFill>
                           <a:latin typeface="Helvetica Neue"/>
                         </a:rPr>
-                        <a:t>LongMemEval + LoCoMo temporal   ·   n = 40</a:t>
+                        <a:t>LongMemEval + LoCoMo temporal   ·   micro-average, n = 40</a:t>
                       </a:r>
                     </a:p>
                   </a:txBody>
@@ -4721,7 +4721,7 @@
                 </a:solidFill>
                 <a:latin typeface="Helvetica Neue"/>
               </a:rPr>
-              <a:t>P1 + P4 + P5 + QA sums to 1.000 on every row: each question is assigned to exactly one stage, so the three failure rates are the complement of accuracy. Bold is the best value in a column. Subsets are pooled by question count. MemFail long_hop is excluded from multi-hop because it reports the benchmark's own error categories rather than probe stages, so it can contribute accuracy but no stages; temporal has no MemFail subset and is unaffected.</a:t>
+              <a:t>P1 + P4 + P5 + QA sums to 1.000 on every row: each question is assigned to exactly one stage, so the three failure rates are the complement of accuracy. Bold is the best value in a column. Every cell is a micro-average: correct answers and questions are summed across the subsets before dividing, so each subset weighs exactly as much as the questions it holds. MemFail long_hop is excluded from multi-hop because it reports the benchmark's own error categories rather than probe stages, so it can contribute accuracy but no stages; temporal has no MemFail subset and is unaffected.</a:t>
             </a:r>
           </a:p>
         </p:txBody>
